--- a/3조 Java 다형성 설계 발표.pptx
+++ b/3조 Java 다형성 설계 발표.pptx
@@ -1480,6 +1480,13 @@
   <p:clrMapOvr>
     <a:masterClrMapping/>
   </p:clrMapOvr>
+  <p:timing>
+    <p:tnLst>
+      <p:par>
+        <p:cTn id="1" dur="indefinite" restart="never" nodeType="tmRoot"/>
+      </p:par>
+    </p:tnLst>
+  </p:timing>
 </p:sld>
 </file>
 
@@ -2877,6 +2884,13 @@
   <p:clrMapOvr>
     <a:masterClrMapping/>
   </p:clrMapOvr>
+  <p:timing>
+    <p:tnLst>
+      <p:par>
+        <p:cTn id="1" dur="indefinite" restart="never" nodeType="tmRoot"/>
+      </p:par>
+    </p:tnLst>
+  </p:timing>
 </p:sld>
 </file>
 
@@ -4286,6 +4300,13 @@
   <p:clrMapOvr>
     <a:masterClrMapping/>
   </p:clrMapOvr>
+  <p:timing>
+    <p:tnLst>
+      <p:par>
+        <p:cTn id="1" dur="indefinite" restart="never" nodeType="tmRoot"/>
+      </p:par>
+    </p:tnLst>
+  </p:timing>
 </p:sld>
 </file>
 
@@ -5672,6 +5693,13 @@
   <p:clrMapOvr>
     <a:masterClrMapping/>
   </p:clrMapOvr>
+  <p:timing>
+    <p:tnLst>
+      <p:par>
+        <p:cTn id="1" dur="indefinite" restart="never" nodeType="tmRoot"/>
+      </p:par>
+    </p:tnLst>
+  </p:timing>
 </p:sld>
 </file>
 
@@ -6549,21 +6577,14 @@
               <a:t>은 </a:t>
             </a:r>
             <a:r>
-              <a:rPr lang="en-US" altLang="ko-KR" sz="800" dirty="0"/>
-              <a:t>Bionic, Dragun</a:t>
-            </a:r>
-            <a:r>
-              <a:rPr lang="ko-KR" altLang="en-US" sz="800" dirty="0"/>
-              <a:t>은 </a:t>
-            </a:r>
-            <a:r>
-              <a:rPr lang="en-US" altLang="ko-KR" sz="800" dirty="0"/>
-              <a:t>Mechanic </a:t>
-            </a:r>
-            <a:r>
-              <a:rPr lang="ko-KR" altLang="en-US" sz="800" dirty="0"/>
-              <a:t>타입으로 분류</a:t>
-            </a:r>
+              <a:rPr lang="en-US" altLang="ko-KR" sz="800" dirty="0" smtClean="0"/>
+              <a:t>Bionic</a:t>
+            </a:r>
+            <a:r>
+              <a:rPr lang="ko-KR" altLang="en-US" sz="800" smtClean="0"/>
+              <a:t>으로 분류함</a:t>
+            </a:r>
+            <a:endParaRPr lang="ko-KR" altLang="en-US" sz="800" dirty="0"/>
           </a:p>
         </p:txBody>
       </p:sp>
@@ -7041,6 +7062,13 @@
   <p:clrMapOvr>
     <a:masterClrMapping/>
   </p:clrMapOvr>
+  <p:timing>
+    <p:tnLst>
+      <p:par>
+        <p:cTn id="1" dur="indefinite" restart="never" nodeType="tmRoot"/>
+      </p:par>
+    </p:tnLst>
+  </p:timing>
 </p:sld>
 </file>
 
@@ -7213,6 +7241,13 @@
   <p:clrMapOvr>
     <a:masterClrMapping/>
   </p:clrMapOvr>
+  <p:timing>
+    <p:tnLst>
+      <p:par>
+        <p:cTn id="1" dur="indefinite" restart="never" nodeType="tmRoot"/>
+      </p:par>
+    </p:tnLst>
+  </p:timing>
 </p:sld>
 </file>
 
